--- a/decks/geog-glaciers/geog-glaciers_ch1_ice-age.pptx
+++ b/decks/geog-glaciers/geog-glaciers_ch1_ice-age.pptx
@@ -125,30 +125,30 @@
   <p:extLst>
     <p:ext uri="{521415D9-36F7-43E2-AB2F-B90AF26B5E84}">
       <p14:sectionLst xmlns:p14="http://schemas.microsoft.com/office/powerpoint/2010/main">
-        <p14:section name="Opening" id="{ad7b3e57-9b8e-7e98-d2d2-356c6ecc5c6d}">
+        <p14:section name="Opening" id="{50ef7a0f-0ed1-53b3-b782-bc1e4829a3a8}">
           <p14:sldIdLst>
             <p14:sldId id="256"/>
           </p14:sldIdLst>
         </p14:section>
-        <p14:section name="Gate" id="{6ff55a83-e468-5965-a7f3-7d619a60c7d3}">
+        <p14:section name="Gate" id="{7fdbf1a8-07df-87df-7c58-284b1bcc37c6}">
           <p14:sldIdLst>
             <p14:sldId id="257"/>
             <p14:sldId id="258"/>
           </p14:sldIdLst>
         </p14:section>
-        <p14:section name="Pre-teach" id="{67da8291-0c4a-9345-a645-e63670d4cd3a}">
+        <p14:section name="Pre-teach" id="{b4774bff-a3a3-3215-ce13-9bf6de11849b}">
           <p14:sldIdLst>
             <p14:sldId id="259"/>
             <p14:sldId id="260"/>
           </p14:sldIdLst>
         </p14:section>
-        <p14:section name="Read-along" id="{5b6f7028-e93d-a60c-7af8-c3dc0749ae2f}">
+        <p14:section name="Read-along" id="{48ce7365-b372-0208-765a-c61449692a51}">
           <p14:sldIdLst>
             <p14:sldId id="261"/>
             <p14:sldId id="262"/>
           </p14:sldIdLst>
         </p14:section>
-        <p14:section name="Teach" id="{fc602929-9879-dd18-6af3-875672e4c31b}">
+        <p14:section name="Teach" id="{35a107df-0bf6-bb15-3c34-39d9a68ad428}">
           <p14:sldIdLst>
             <p14:sldId id="263"/>
             <p14:sldId id="264"/>
@@ -156,7 +156,7 @@
             <p14:sldId id="266"/>
           </p14:sldIdLst>
         </p14:section>
-        <p14:section name="Routes" id="{209e7dc4-1881-c3f8-4cfd-0d8dd474f993}">
+        <p14:section name="Routes" id="{e3aa8cab-db71-ecfa-157c-7c42fc1c99af}">
           <p14:sldIdLst>
             <p14:sldId id="267"/>
             <p14:sldId id="268"/>
@@ -164,12 +164,12 @@
             <p14:sldId id="270"/>
           </p14:sldIdLst>
         </p14:section>
-        <p14:section name="Close" id="{5043d28f-ef53-1e7d-7685-0dc9b4f0e44e}">
+        <p14:section name="Close" id="{1eb7e28c-112f-8e27-1767-2a4d5f4ca8ad}">
           <p14:sldIdLst>
             <p14:sldId id="271"/>
           </p14:sldIdLst>
         </p14:section>
-        <p14:section name="Answers" id="{07087f10-233b-70eb-4c34-b6bebe6d357f}">
+        <p14:section name="Answers" id="{7b7fac6b-7594-8f1c-574e-bbbb6874fc15}">
           <p14:sldIdLst>
             <p14:sldId id="272"/>
             <p14:sldId id="273"/>
